--- a/classes/parte-13-seguridad-movil-iot-e-inalambrica/270-ataques-a-rfid-y-nfc/clase-270-presentacion.pptx
+++ b/classes/parte-13-seguridad-movil-iot-e-inalambrica/270-ataques-a-rfid-y-nfc/clase-270-presentacion.pptx
@@ -21,6 +21,7 @@
     <p:sldId id="269" r:id="rId20"/>
     <p:sldId id="270" r:id="rId21"/>
     <p:sldId id="271" r:id="rId22"/>
+    <p:sldId id="272" r:id="rId23"/>
   </p:sldIdLst>
   <p:sldSz cx="9144000" cy="6858000" type="screen4x3"/>
   <p:notesSz cx="6858000" cy="9144000"/>
@@ -3131,7 +3132,7 @@
                   <a:srgbClr val="0B3D2E"/>
                 </a:solidFill>
               </a:rPr>
-              <a:t>Clase 270 — Ataques a RFID y NFC</a:t>
+              <a:t>Clase 270 — Auditoría de RFID, NFC y credenciales de proximidad</a:t>
             </a:r>
           </a:p>
           <a:p>
@@ -3202,7 +3203,7 @@
                   <a:srgbClr val="0B3D2E"/>
                 </a:solidFill>
               </a:rPr>
-              <a:t>🧪 Laboratorio guiado</a:t>
+              <a:t>🧪 Laboratorio guiado — UID no es autorización</a:t>
             </a:r>
           </a:p>
         </p:txBody>
@@ -3240,97 +3241,97 @@
                   <a:srgbClr val="22282E"/>
                 </a:solidFill>
               </a:rPr>
-              <a:t>•  Identifica tus tags: con lf search y hf search determina la tecnología de tarjetas propias.</a:t>
-            </a:r>
-          </a:p>
-          <a:p>
-            <a:pPr>
-              <a:spcAft>
-                <a:spcPts val="600"/>
-              </a:spcAft>
-            </a:pPr>
-            <a:r>
-              <a:rPr sz="1500">
-                <a:solidFill>
-                  <a:srgbClr val="22282E"/>
-                </a:solidFill>
-              </a:rPr>
-              <a:t>•  LF simple: lee un EM4100 propio (lf em 410x reader) y observa que solo entrega un ID.</a:t>
-            </a:r>
-          </a:p>
-          <a:p>
-            <a:pPr>
-              <a:spcAft>
-                <a:spcPts val="600"/>
-              </a:spcAft>
-            </a:pPr>
-            <a:r>
-              <a:rPr sz="1500">
-                <a:solidFill>
-                  <a:srgbClr val="22282E"/>
-                </a:solidFill>
-              </a:rPr>
-              <a:t>•  HF/NFC: con hf 14a info obtén UID, ATQA/SAK y el tipo de MIFARE.</a:t>
-            </a:r>
-          </a:p>
-          <a:p>
-            <a:pPr>
-              <a:spcAft>
-                <a:spcPts val="600"/>
-              </a:spcAft>
-            </a:pPr>
-            <a:r>
-              <a:rPr sz="1500">
-                <a:solidFill>
-                  <a:srgbClr val="22282E"/>
-                </a:solidFill>
-              </a:rPr>
-              <a:t>•  Ataca MIFARE Classic (propia): ejecuta hf mf autopwn (o mfoc) para recuperar claves de los sectores.</a:t>
-            </a:r>
-          </a:p>
-          <a:p>
-            <a:pPr>
-              <a:spcAft>
-                <a:spcPts val="600"/>
-              </a:spcAft>
-            </a:pPr>
-            <a:r>
-              <a:rPr sz="1500">
-                <a:solidFill>
-                  <a:srgbClr val="22282E"/>
-                </a:solidFill>
-              </a:rPr>
-              <a:t>•  Vuelca la tarjeta: genera el dump completo y ábrelo para inspeccionar los datos de los bloques.</a:t>
-            </a:r>
-          </a:p>
-          <a:p>
-            <a:pPr>
-              <a:spcAft>
-                <a:spcPts val="600"/>
-              </a:spcAft>
-            </a:pPr>
-            <a:r>
-              <a:rPr sz="1500">
-                <a:solidFill>
-                  <a:srgbClr val="22282E"/>
-                </a:solidFill>
-              </a:rPr>
-              <a:t>•  Clona a magic card: escribe el dump y fija el UID en una magic card y verifica que el lector la reconoce igual.</a:t>
-            </a:r>
-          </a:p>
-          <a:p>
-            <a:pPr>
-              <a:spcAft>
-                <a:spcPts val="600"/>
-              </a:spcAft>
-            </a:pPr>
-            <a:r>
-              <a:rPr sz="1500">
-                <a:solidFill>
-                  <a:srgbClr val="22282E"/>
-                </a:solidFill>
-              </a:rPr>
-              <a:t>•  Analiza NTAG/NDEF: lee un tag NTAG213 propio y su registro NDEF con NFC Tools.</a:t>
+              <a:t>•  Objetivo. Demostrar con dos credenciales de prueba que identificación, lectura y acceso son decisiones diferentes.</a:t>
+            </a:r>
+          </a:p>
+          <a:p>
+            <a:pPr>
+              <a:spcAft>
+                <a:spcPts val="600"/>
+              </a:spcAft>
+            </a:pPr>
+            <a:r>
+              <a:rPr sz="1500">
+                <a:solidFill>
+                  <a:srgbClr val="22282E"/>
+                </a:solidFill>
+              </a:rPr>
+              <a:t>•  Prerrequisitos. Clase 025; banco aislado; credenciales adquiridas para docencia; logs exportables; firmware/cliente registrados.</a:t>
+            </a:r>
+          </a:p>
+          <a:p>
+            <a:pPr>
+              <a:spcAft>
+                <a:spcPts val="600"/>
+              </a:spcAft>
+            </a:pPr>
+            <a:r>
+              <a:rPr sz="1500">
+                <a:solidFill>
+                  <a:srgbClr val="22282E"/>
+                </a:solidFill>
+              </a:rPr>
+              <a:t>•  Topología. Credencial A/B ↔ herramienta de identificación; credencial A/B ↔ lector de mesa → controlador/backend simulado → evento allow/deny. No hay cerradura ni datos personales.</a:t>
+            </a:r>
+          </a:p>
+          <a:p>
+            <a:pPr>
+              <a:spcAft>
+                <a:spcPts val="600"/>
+              </a:spcAft>
+            </a:pPr>
+            <a:r>
+              <a:rPr sz="1500">
+                <a:solidFill>
+                  <a:srgbClr val="22282E"/>
+                </a:solidFill>
+              </a:rPr>
+              <a:t>•  Procedimiento.</a:t>
+            </a:r>
+          </a:p>
+          <a:p>
+            <a:pPr>
+              <a:spcAft>
+                <a:spcPts val="600"/>
+              </a:spcAft>
+            </a:pPr>
+            <a:r>
+              <a:rPr sz="1500">
+                <a:solidFill>
+                  <a:srgbClr val="22282E"/>
+                </a:solidFill>
+              </a:rPr>
+              <a:t>•  Inventaría cada credencial sin asumir tecnología por color o forma. Registra herramienta, antena, firmware y hora.</a:t>
+            </a:r>
+          </a:p>
+          <a:p>
+            <a:pPr>
+              <a:spcAft>
+                <a:spcPts val="600"/>
+              </a:spcAft>
+            </a:pPr>
+            <a:r>
+              <a:rPr sz="1500">
+                <a:solidFill>
+                  <a:srgbClr val="22282E"/>
+                </a:solidFill>
+              </a:rPr>
+              <a:t>•  Ejecuta búsqueda LF y HF por separado. Conserva salida cruda y conclusión: familia probable, frecuencia e información visible.</a:t>
+            </a:r>
+          </a:p>
+          <a:p>
+            <a:pPr>
+              <a:spcAft>
+                <a:spcPts val="600"/>
+              </a:spcAft>
+            </a:pPr>
+            <a:r>
+              <a:rPr sz="1500">
+                <a:solidFill>
+                  <a:srgbClr val="22282E"/>
+                </a:solidFill>
+              </a:rPr>
+              <a:t>•  Para la credencial autorizada A, registra qué campos puede leer sin autenticación y cuáles no. No ejecutes ataques de clave.</a:t>
             </a:r>
           </a:p>
         </p:txBody>
@@ -3381,7 +3382,7 @@
                   <a:srgbClr val="0B3D2E"/>
                 </a:solidFill>
               </a:rPr>
-              <a:t>✍️ Ejercicios</a:t>
+              <a:t>🔍 Caso razonado — El UID copiado no abre la puerta</a:t>
             </a:r>
           </a:p>
         </p:txBody>
@@ -3419,82 +3420,7 @@
                   <a:srgbClr val="22282E"/>
                 </a:solidFill>
               </a:rPr>
-              <a:t>•  Identifica y clasifica tres tags propios por frecuencia y estándar.</a:t>
-            </a:r>
-          </a:p>
-          <a:p>
-            <a:pPr>
-              <a:spcAft>
-                <a:spcPts val="600"/>
-              </a:spcAft>
-            </a:pPr>
-            <a:r>
-              <a:rPr sz="1500">
-                <a:solidFill>
-                  <a:srgbClr val="22282E"/>
-                </a:solidFill>
-              </a:rPr>
-              <a:t>•  Extrae el ID de un tag LF EM4100 propio.</a:t>
-            </a:r>
-          </a:p>
-          <a:p>
-            <a:pPr>
-              <a:spcAft>
-                <a:spcPts val="600"/>
-              </a:spcAft>
-            </a:pPr>
-            <a:r>
-              <a:rPr sz="1500">
-                <a:solidFill>
-                  <a:srgbClr val="22282E"/>
-                </a:solidFill>
-              </a:rPr>
-              <a:t>•  Recupera las claves de una MIFARE Classic propia y explica qué ataque se usó.</a:t>
-            </a:r>
-          </a:p>
-          <a:p>
-            <a:pPr>
-              <a:spcAft>
-                <a:spcPts val="600"/>
-              </a:spcAft>
-            </a:pPr>
-            <a:r>
-              <a:rPr sz="1500">
-                <a:solidFill>
-                  <a:srgbClr val="22282E"/>
-                </a:solidFill>
-              </a:rPr>
-              <a:t>•  Vuelca y analiza los sectores de una tarjeta propia.</a:t>
-            </a:r>
-          </a:p>
-          <a:p>
-            <a:pPr>
-              <a:spcAft>
-                <a:spcPts val="600"/>
-              </a:spcAft>
-            </a:pPr>
-            <a:r>
-              <a:rPr sz="1500">
-                <a:solidFill>
-                  <a:srgbClr val="22282E"/>
-                </a:solidFill>
-              </a:rPr>
-              <a:t>•  Clona un tag propio a una magic card y verifica la lectura.</a:t>
-            </a:r>
-          </a:p>
-          <a:p>
-            <a:pPr>
-              <a:spcAft>
-                <a:spcPts val="600"/>
-              </a:spcAft>
-            </a:pPr>
-            <a:r>
-              <a:rPr sz="1500">
-                <a:solidFill>
-                  <a:srgbClr val="22282E"/>
-                </a:solidFill>
-              </a:rPr>
-              <a:t>•  Redacta tres recomendaciones para endurecer un sistema de acceso por proximidad.</a:t>
+              <a:t>•  Una herramienta lee un UID y lo emula, pero el lector de prueba deniega. El resultado no «desmiente» la captura: demuestra que el sistema exige algo adicional. El alumno revisa si el lector autenticó…</a:t>
             </a:r>
           </a:p>
         </p:txBody>
@@ -3545,7 +3471,7 @@
                   <a:srgbClr val="0B3D2E"/>
                 </a:solidFill>
               </a:rPr>
-              <a:t>📝 Reto verificable</a:t>
+              <a:t>✍️ Ejercicios</a:t>
             </a:r>
           </a:p>
         </p:txBody>
@@ -3583,7 +3509,82 @@
                   <a:srgbClr val="22282E"/>
                 </a:solidFill>
               </a:rPr>
-              <a:t>•  Recupera todas las claves de una tarjeta MIFARE Classic de tu propiedad, vuelca su contenido y clónala a una magic card. Criterio de aceptación: el clon es reconocido por el mismo lector que la…</a:t>
+              <a:t>•  Clasifica cinco objetos como credencial, lector, instrumento, objetivo o control defensivo.</a:t>
+            </a:r>
+          </a:p>
+          <a:p>
+            <a:pPr>
+              <a:spcAft>
+                <a:spcPts val="600"/>
+              </a:spcAft>
+            </a:pPr>
+            <a:r>
+              <a:rPr sz="1500">
+                <a:solidFill>
+                  <a:srgbClr val="22282E"/>
+                </a:solidFill>
+              </a:rPr>
+              <a:t>•  Explica por qué dos tarjetas a 13,56 MHz pueden tener propiedades de seguridad opuestas.</a:t>
+            </a:r>
+          </a:p>
+          <a:p>
+            <a:pPr>
+              <a:spcAft>
+                <a:spcPts val="600"/>
+              </a:spcAft>
+            </a:pPr>
+            <a:r>
+              <a:rPr sz="1500">
+                <a:solidFill>
+                  <a:srgbClr val="22282E"/>
+                </a:solidFill>
+              </a:rPr>
+              <a:t>•  Compara lector PC/SC, Proxmark3 y Flipper Zero para identificar una tarjeta desconocida.</a:t>
+            </a:r>
+          </a:p>
+          <a:p>
+            <a:pPr>
+              <a:spcAft>
+                <a:spcPts val="600"/>
+              </a:spcAft>
+            </a:pPr>
+            <a:r>
+              <a:rPr sz="1500">
+                <a:solidFill>
+                  <a:srgbClr val="22282E"/>
+                </a:solidFill>
+              </a:rPr>
+              <a:t>•  Diseña una alerta de «viaje imposible» entre lectores usando campos reales de un CSV dado.</a:t>
+            </a:r>
+          </a:p>
+          <a:p>
+            <a:pPr>
+              <a:spcAft>
+                <a:spcPts val="600"/>
+              </a:spcAft>
+            </a:pPr>
+            <a:r>
+              <a:rPr sz="1500">
+                <a:solidFill>
+                  <a:srgbClr val="22282E"/>
+                </a:solidFill>
+              </a:rPr>
+              <a:t>•  Propón respuesta ante un lector portátil hallado junto a una puerta sin asumir que fue utilizado.</a:t>
+            </a:r>
+          </a:p>
+          <a:p>
+            <a:pPr>
+              <a:spcAft>
+                <a:spcPts val="600"/>
+              </a:spcAft>
+            </a:pPr>
+            <a:r>
+              <a:rPr sz="1500">
+                <a:solidFill>
+                  <a:srgbClr val="22282E"/>
+                </a:solidFill>
+              </a:rPr>
+              <a:t>•  Define qué competencia no puede certificarse con trazas grabadas.</a:t>
             </a:r>
           </a:p>
         </p:txBody>
@@ -3634,7 +3635,7 @@
                   <a:srgbClr val="0B3D2E"/>
                 </a:solidFill>
               </a:rPr>
-              <a:t>⚠️ Errores comunes</a:t>
+              <a:t>📝 Reto verificable</a:t>
             </a:r>
           </a:p>
         </p:txBody>
@@ -3672,67 +3673,22 @@
                   <a:srgbClr val="22282E"/>
                 </a:solidFill>
               </a:rPr>
-              <a:t>•  hf search no detecta nada — Tag HF fuera de antena o es LF; prueba lf search</a:t>
-            </a:r>
-          </a:p>
-          <a:p>
-            <a:pPr>
-              <a:spcAft>
-                <a:spcPts val="600"/>
-              </a:spcAft>
-            </a:pPr>
-            <a:r>
-              <a:rPr sz="1500">
-                <a:solidFill>
-                  <a:srgbClr val="22282E"/>
-                </a:solidFill>
-              </a:rPr>
-              <a:t>•  autopwn no recupera claves — Tarjeta no es Classic (DESFire) o hardened; usa otra técnica</a:t>
-            </a:r>
-          </a:p>
-          <a:p>
-            <a:pPr>
-              <a:spcAft>
-                <a:spcPts val="600"/>
-              </a:spcAft>
-            </a:pPr>
-            <a:r>
-              <a:rPr sz="1500">
-                <a:solidFill>
-                  <a:srgbClr val="22282E"/>
-                </a:solidFill>
-              </a:rPr>
-              <a:t>•  La emulación de UID no funciona en el lector — El sistema valida memoria, autenticación, estado o backend. Documenta qué capa rechazó la tarjeta; no intentes copiar una credencial real.</a:t>
-            </a:r>
-          </a:p>
-          <a:p>
-            <a:pPr>
-              <a:spcAft>
-                <a:spcPts val="600"/>
-              </a:spcAft>
-            </a:pPr>
-            <a:r>
-              <a:rPr sz="1500">
-                <a:solidFill>
-                  <a:srgbClr val="22282E"/>
-                </a:solidFill>
-              </a:rPr>
-              <a:t>•  Magic card rechaza el UID — Tipo de magic (gen1a/gen2) equivocado; usa el comando adecuado</a:t>
-            </a:r>
-          </a:p>
-          <a:p>
-            <a:pPr>
-              <a:spcAft>
-                <a:spcPts val="600"/>
-              </a:spcAft>
-            </a:pPr>
-            <a:r>
-              <a:rPr sz="1500">
-                <a:solidFill>
-                  <a:srgbClr val="22282E"/>
-                </a:solidFill>
-              </a:rPr>
-              <a:t>•  Lecturas intermitentes — Mala posición/antena; centra el tag sobre la antena</a:t>
+              <a:t>•  Entrega un informe del sistema de mesa: arquitectura, identificación de credenciales, matriz UID/datos/autenticación/autorización, eventos, prueba del control, revocación, restauración y limitaciones.</a:t>
+            </a:r>
+          </a:p>
+          <a:p>
+            <a:pPr>
+              <a:spcAft>
+                <a:spcPts val="600"/>
+              </a:spcAft>
+            </a:pPr>
+            <a:r>
+              <a:rPr sz="1500">
+                <a:solidFill>
+                  <a:srgbClr val="22282E"/>
+                </a:solidFill>
+              </a:rPr>
+              <a:t>•  Criterio de aceptación: toda credencial es propia/de prueba; el alumno no generaliza una debilidad entre familias; demuestra una decisión insegura y su corrección con resultados observables…</a:t>
             </a:r>
           </a:p>
         </p:txBody>
@@ -3783,7 +3739,7 @@
                   <a:srgbClr val="0B3D2E"/>
                 </a:solidFill>
               </a:rPr>
-              <a:t>❓ Preguntas frecuentes</a:t>
+              <a:t>⚠️ Errores comunes</a:t>
             </a:r>
           </a:p>
         </p:txBody>
@@ -3821,82 +3777,97 @@
                   <a:srgbClr val="22282E"/>
                 </a:solidFill>
               </a:rPr>
-              <a:t>•  ❓ ¿Por qué MIFARE Classic sigue en uso si su cifrado está roto?</a:t>
-            </a:r>
-          </a:p>
-          <a:p>
-            <a:pPr>
-              <a:spcAft>
-                <a:spcPts val="600"/>
-              </a:spcAft>
-            </a:pPr>
-            <a:r>
-              <a:rPr sz="1500">
-                <a:solidFill>
-                  <a:srgbClr val="22282E"/>
-                </a:solidFill>
-              </a:rPr>
-              <a:t>•  Por costo e inercia de despliegue. Muchos sistemas heredados no se han migrado, aunque las alternativas seguras (DESFire) existen desde hace años.</a:t>
-            </a:r>
-          </a:p>
-          <a:p>
-            <a:pPr>
-              <a:spcAft>
-                <a:spcPts val="600"/>
-              </a:spcAft>
-            </a:pPr>
-            <a:r>
-              <a:rPr sz="1500">
-                <a:solidFill>
-                  <a:srgbClr val="22282E"/>
-                </a:solidFill>
-              </a:rPr>
-              <a:t>•  ❓ ¿Clonar un tag LF es realmente tan fácil?</a:t>
-            </a:r>
-          </a:p>
-          <a:p>
-            <a:pPr>
-              <a:spcAft>
-                <a:spcPts val="600"/>
-              </a:spcAft>
-            </a:pPr>
-            <a:r>
-              <a:rPr sz="1500">
-                <a:solidFill>
-                  <a:srgbClr val="22282E"/>
-                </a:solidFill>
-              </a:rPr>
-              <a:t>•  Sí: la mayoría solo emite un ID sin autenticación, así que leerlo y reescribirlo en un tag regrabable basta. Por eso no debe usarse como único control de acceso.</a:t>
-            </a:r>
-          </a:p>
-          <a:p>
-            <a:pPr>
-              <a:spcAft>
-                <a:spcPts val="600"/>
-              </a:spcAft>
-            </a:pPr>
-            <a:r>
-              <a:rPr sz="1500">
-                <a:solidFill>
-                  <a:srgbClr val="22282E"/>
-                </a:solidFill>
-              </a:rPr>
-              <a:t>•  ❓ ¿Puedo clonar tarjetas de pago o transporte con esto?</a:t>
-            </a:r>
-          </a:p>
-          <a:p>
-            <a:pPr>
-              <a:spcAft>
-                <a:spcPts val="600"/>
-              </a:spcAft>
-            </a:pPr>
-            <a:r>
-              <a:rPr sz="1500">
-                <a:solidFill>
-                  <a:srgbClr val="22282E"/>
-                </a:solidFill>
-              </a:rPr>
-              <a:t>•  No de forma útil ni legal: los sistemas de pago usan criptografía fuerte y validación en backend; intentarlo es fraude.</a:t>
+              <a:t>•  Error — Por qué falla</a:t>
+            </a:r>
+          </a:p>
+          <a:p>
+            <a:pPr>
+              <a:spcAft>
+                <a:spcPts val="600"/>
+              </a:spcAft>
+            </a:pPr>
+            <a:r>
+              <a:rPr sz="1500">
+                <a:solidFill>
+                  <a:srgbClr val="22282E"/>
+                </a:solidFill>
+              </a:rPr>
+              <a:t>•  «13,56 MHz = NFC clonable» — frecuencia no define memoria, claves ni backend</a:t>
+            </a:r>
+          </a:p>
+          <a:p>
+            <a:pPr>
+              <a:spcAft>
+                <a:spcPts val="600"/>
+              </a:spcAft>
+            </a:pPr>
+            <a:r>
+              <a:rPr sz="1500">
+                <a:solidFill>
+                  <a:srgbClr val="22282E"/>
+                </a:solidFill>
+              </a:rPr>
+              <a:t>•  «Leí UID, leí la tarjeta» — UID puede ser lo único visible</a:t>
+            </a:r>
+          </a:p>
+          <a:p>
+            <a:pPr>
+              <a:spcAft>
+                <a:spcPts val="600"/>
+              </a:spcAft>
+            </a:pPr>
+            <a:r>
+              <a:rPr sz="1500">
+                <a:solidFill>
+                  <a:srgbClr val="22282E"/>
+                </a:solidFill>
+              </a:rPr>
+              <a:t>•  «Flipper soporta NFC, entonces reemplaza Proxmark3» — profundidad, trazas y soporte difieren</a:t>
+            </a:r>
+          </a:p>
+          <a:p>
+            <a:pPr>
+              <a:spcAft>
+                <a:spcPts val="600"/>
+              </a:spcAft>
+            </a:pPr>
+            <a:r>
+              <a:rPr sz="1500">
+                <a:solidFill>
+                  <a:srgbClr val="22282E"/>
+                </a:solidFill>
+              </a:rPr>
+              <a:t>•  Firmware/cliente Proxmark3 mezclados — comandos/resultados incompatibles</a:t>
+            </a:r>
+          </a:p>
+          <a:p>
+            <a:pPr>
+              <a:spcAft>
+                <a:spcPts val="600"/>
+              </a:spcAft>
+            </a:pPr>
+            <a:r>
+              <a:rPr sz="1500">
+                <a:solidFill>
+                  <a:srgbClr val="22282E"/>
+                </a:solidFill>
+              </a:rPr>
+              <a:t>•  Probar en una puerta real — riesgo físico y acceso no autorizado</a:t>
+            </a:r>
+          </a:p>
+          <a:p>
+            <a:pPr>
+              <a:spcAft>
+                <a:spcPts val="600"/>
+              </a:spcAft>
+            </a:pPr>
+            <a:r>
+              <a:rPr sz="1500">
+                <a:solidFill>
+                  <a:srgbClr val="22282E"/>
+                </a:solidFill>
+              </a:rPr>
+              <a:t>•  Revocar todo el lote — impacto operacional no proporcional</a:t>
             </a:r>
           </a:p>
         </p:txBody>
@@ -3947,7 +3918,7 @@
                   <a:srgbClr val="0B3D2E"/>
                 </a:solidFill>
               </a:rPr>
-              <a:t>🔗 Referencias</a:t>
+              <a:t>❓ Preguntas frecuentes</a:t>
             </a:r>
           </a:p>
         </p:txBody>
@@ -3985,52 +3956,52 @@
                   <a:srgbClr val="22282E"/>
                 </a:solidFill>
               </a:rPr>
-              <a:t>•  Proxmark3 (Iceman): &lt;https://github.com/RfidResearchGroup/proxmark3&gt;</a:t>
-            </a:r>
-          </a:p>
-          <a:p>
-            <a:pPr>
-              <a:spcAft>
-                <a:spcPts val="600"/>
-              </a:spcAft>
-            </a:pPr>
-            <a:r>
-              <a:rPr sz="1500">
-                <a:solidFill>
-                  <a:srgbClr val="22282E"/>
-                </a:solidFill>
-              </a:rPr>
-              <a:t>•  libnfc/mfoc: &lt;https://github.com/nfc-tools&gt;</a:t>
-            </a:r>
-          </a:p>
-          <a:p>
-            <a:pPr>
-              <a:spcAft>
-                <a:spcPts val="600"/>
-              </a:spcAft>
-            </a:pPr>
-            <a:r>
-              <a:rPr sz="1500">
-                <a:solidFill>
-                  <a:srgbClr val="22282E"/>
-                </a:solidFill>
-              </a:rPr>
-              <a:t>•  Investigación sobre Crypto-1 (Nohl, Garcia et al.) — publicaciones académicas de la ruptura de MIFARE.</a:t>
-            </a:r>
-          </a:p>
-          <a:p>
-            <a:pPr>
-              <a:spcAft>
-                <a:spcPts val="600"/>
-              </a:spcAft>
-            </a:pPr>
-            <a:r>
-              <a:rPr sz="1500">
-                <a:solidFill>
-                  <a:srgbClr val="22282E"/>
-                </a:solidFill>
-              </a:rPr>
-              <a:t>•  Practical IoT Hacking, caps. de RFID — Chantzis et al.</a:t>
+              <a:t>•  ¿Flipper Zero puede clonar cualquier credencial? No. La documentación diferencia tecnologías y, en algunos casos, solo permite emular UID o datos disponibles. Autenticación, claves, lector y backend…</a:t>
+            </a:r>
+          </a:p>
+          <a:p>
+            <a:pPr>
+              <a:spcAft>
+                <a:spcPts val="600"/>
+              </a:spcAft>
+            </a:pPr>
+            <a:r>
+              <a:rPr sz="1500">
+                <a:solidFill>
+                  <a:srgbClr val="22282E"/>
+                </a:solidFill>
+              </a:rPr>
+              <a:t>•  ¿Proxmark3 es siempre mejor? Es más especializado para investigación RFID LF/HF, pero requiere aprendizaje y compatibilidad. Un lector PC/SC puede ser más adecuado para una aplicación NFC concreta.</a:t>
+            </a:r>
+          </a:p>
+          <a:p>
+            <a:pPr>
+              <a:spcAft>
+                <a:spcPts val="600"/>
+              </a:spcAft>
+            </a:pPr>
+            <a:r>
+              <a:rPr sz="1500">
+                <a:solidFill>
+                  <a:srgbClr val="22282E"/>
+                </a:solidFill>
+              </a:rPr>
+              <a:t>•  ¿Una funda bloqueadora resuelve el sistema? Reduce lectura accidental/remota en ciertas condiciones, pero no corrige enrolamiento, backend, pérdida de credencial o tailgating.</a:t>
+            </a:r>
+          </a:p>
+          <a:p>
+            <a:pPr>
+              <a:spcAft>
+                <a:spcPts val="600"/>
+              </a:spcAft>
+            </a:pPr>
+            <a:r>
+              <a:rPr sz="1500">
+                <a:solidFill>
+                  <a:srgbClr val="22282E"/>
+                </a:solidFill>
+              </a:rPr>
+              <a:t>•  ¿Leer mi propia tarjeta basta para practicar? Solo si también controlas el sistema y los datos asociados. Propiedad física no siempre concede derecho a extraer secretos de un emisor tercero.</a:t>
             </a:r>
           </a:p>
         </p:txBody>
@@ -4061,6 +4032,185 @@
         </p:nvSpPr>
         <p:spPr>
           <a:xfrm>
+            <a:off x="457200" y="320040"/>
+            <a:ext cx="8229600" cy="822960"/>
+          </a:xfrm>
+          <a:prstGeom prst="rect">
+            <a:avLst/>
+          </a:prstGeom>
+          <a:noFill/>
+        </p:spPr>
+        <p:txBody>
+          <a:bodyPr wrap="square">
+            <a:spAutoFit/>
+          </a:bodyPr>
+          <a:lstStyle/>
+          <a:p>
+            <a:r>
+              <a:rPr sz="2600" b="1">
+                <a:solidFill>
+                  <a:srgbClr val="0B3D2E"/>
+                </a:solidFill>
+              </a:rPr>
+              <a:t>🔗 Referencias verificables y alcance</a:t>
+            </a:r>
+          </a:p>
+        </p:txBody>
+      </p:sp>
+      <p:sp>
+        <p:nvSpPr>
+          <p:cNvPr id="3" name="TextBox 2"/>
+          <p:cNvSpPr txBox="1"/>
+          <p:nvPr/>
+        </p:nvSpPr>
+        <p:spPr>
+          <a:xfrm>
+            <a:off x="457200" y="1280160"/>
+            <a:ext cx="8229600" cy="4937760"/>
+          </a:xfrm>
+          <a:prstGeom prst="rect">
+            <a:avLst/>
+          </a:prstGeom>
+          <a:noFill/>
+        </p:spPr>
+        <p:txBody>
+          <a:bodyPr wrap="square">
+            <a:spAutoFit/>
+          </a:bodyPr>
+          <a:lstStyle/>
+          <a:p>
+            <a:pPr>
+              <a:spcAft>
+                <a:spcPts val="600"/>
+              </a:spcAft>
+            </a:pPr>
+            <a:r>
+              <a:rPr sz="1500">
+                <a:solidFill>
+                  <a:srgbClr val="22282E"/>
+                </a:solidFill>
+              </a:rPr>
+              <a:t>•  NFC Forum, Specifications — arquitectura y especificaciones NFC; algunas requieren acceso del programa miembro.</a:t>
+            </a:r>
+          </a:p>
+          <a:p>
+            <a:pPr>
+              <a:spcAft>
+                <a:spcPts val="600"/>
+              </a:spcAft>
+            </a:pPr>
+            <a:r>
+              <a:rPr sz="1500">
+                <a:solidFill>
+                  <a:srgbClr val="22282E"/>
+                </a:solidFill>
+              </a:rPr>
+              <a:t>•  NXP, MIFARE product portfolio — diferencia familias; no se atribuye una propiedad a toda la marca.</a:t>
+            </a:r>
+          </a:p>
+          <a:p>
+            <a:pPr>
+              <a:spcAft>
+                <a:spcPts val="600"/>
+              </a:spcAft>
+            </a:pPr>
+            <a:r>
+              <a:rPr sz="1500">
+                <a:solidFill>
+                  <a:srgbClr val="22282E"/>
+                </a:solidFill>
+              </a:rPr>
+              <a:t>•  RfidResearchGroup, Proxmark3 — firmware/cliente, documentación y soporte por comandos.</a:t>
+            </a:r>
+          </a:p>
+          <a:p>
+            <a:pPr>
+              <a:spcAft>
+                <a:spcPts val="600"/>
+              </a:spcAft>
+            </a:pPr>
+            <a:r>
+              <a:rPr sz="1500">
+                <a:solidFill>
+                  <a:srgbClr val="22282E"/>
+                </a:solidFill>
+              </a:rPr>
+              <a:t>•  Flipper Devices, documentación de Flipper Zero, especificaciones de hardware y lectura/emulación NFC — interfaces, familias y límites documentados.</a:t>
+            </a:r>
+          </a:p>
+          <a:p>
+            <a:pPr>
+              <a:spcAft>
+                <a:spcPts val="600"/>
+              </a:spcAft>
+            </a:pPr>
+            <a:r>
+              <a:rPr sz="1500">
+                <a:solidFill>
+                  <a:srgbClr val="22282E"/>
+                </a:solidFill>
+              </a:rPr>
+              <a:t>•  SIA, OSDP — enlace lector-controlador y Secure Channel.</a:t>
+            </a:r>
+          </a:p>
+          <a:p>
+            <a:pPr>
+              <a:spcAft>
+                <a:spcPts val="600"/>
+              </a:spcAft>
+            </a:pPr>
+            <a:r>
+              <a:rPr sz="1500">
+                <a:solidFill>
+                  <a:srgbClr val="22282E"/>
+                </a:solidFill>
+              </a:rPr>
+              <a:t>•  NIST, SP 800-116 Rev. 1 — uso de credenciales PIV en acceso físico; referencia de arquitectura y niveles, no prescripción universal.</a:t>
+            </a:r>
+          </a:p>
+          <a:p>
+            <a:pPr>
+              <a:spcAft>
+                <a:spcPts val="600"/>
+              </a:spcAft>
+            </a:pPr>
+            <a:r>
+              <a:rPr sz="1500">
+                <a:solidFill>
+                  <a:srgbClr val="22282E"/>
+                </a:solidFill>
+              </a:rPr>
+              <a:t>•  NIST, SP 800-53 Rev. 5 — controles de acceso físico, identidad, auditoría y respuesta.</a:t>
+            </a:r>
+          </a:p>
+        </p:txBody>
+      </p:sp>
+    </p:spTree>
+  </p:cSld>
+  <p:clrMapOvr>
+    <a:masterClrMapping/>
+  </p:clrMapOvr>
+</p:sld>
+</file>
+
+<file path=ppt/slides/slide17.xml><?xml version="1.0" encoding="utf-8"?>
+<p:sld xmlns:a="http://schemas.openxmlformats.org/drawingml/2006/main" xmlns:p="http://schemas.openxmlformats.org/presentationml/2006/main" xmlns:r="http://schemas.openxmlformats.org/officeDocument/2006/relationships">
+  <p:cSld>
+    <p:spTree>
+      <p:nvGrpSpPr>
+        <p:cNvPr id="1" name=""/>
+        <p:cNvGrpSpPr/>
+        <p:nvPr/>
+      </p:nvGrpSpPr>
+      <p:grpSpPr/>
+      <p:sp>
+        <p:nvSpPr>
+          <p:cNvPr id="2" name="TextBox 1"/>
+          <p:cNvSpPr txBox="1"/>
+          <p:nvPr/>
+        </p:nvSpPr>
+        <p:spPr>
+          <a:xfrm>
             <a:off x="457200" y="274320"/>
             <a:ext cx="8229600" cy="640080"/>
           </a:xfrm>
@@ -4088,7 +4238,7 @@
       </p:sp>
       <p:pic>
         <p:nvPicPr>
-          <p:cNvPr id="3" name="Picture 2" descr="31a62510110e14bf.png"/>
+          <p:cNvPr id="3" name="Picture 2" descr="a4c9222725c24193.png"/>
           <p:cNvPicPr>
             <a:picLocks noChangeAspect="1"/>
           </p:cNvPicPr>
@@ -4102,8 +4252,8 @@
         </p:blipFill>
         <p:spPr>
           <a:xfrm>
-            <a:off x="457200" y="2953512"/>
-            <a:ext cx="8229600" cy="1591056"/>
+            <a:off x="457200" y="3209089"/>
+            <a:ext cx="8229600" cy="1079902"/>
           </a:xfrm>
           <a:prstGeom prst="rect">
             <a:avLst/>
@@ -4194,7 +4344,7 @@
                   <a:srgbClr val="22282E"/>
                 </a:solidFill>
               </a:rPr>
-              <a:t>•  Comprender y auditar tecnologías RFID de baja frecuencia (125 kHz) y alta frecuencia/NFC (13.56 MHz): cómo funcionan las tarjetas de acceso y de transporte, sus debilidades criptográficas históricas…</a:t>
+              <a:t>•  Auditar un sistema de proximidad propio sin reducirlo a «clonar una tarjeta». El alumno distinguirá tecnología, credencial, lector, controlador y backend; identificará familias LF/HF; observará…</a:t>
             </a:r>
           </a:p>
         </p:txBody>
@@ -4298,82 +4448,82 @@
                   <a:srgbClr val="22282E"/>
                 </a:solidFill>
               </a:rPr>
-              <a:t>•  Distinguir RFID LF (125 kHz) de HF/NFC (13.56 MHz) y sus estándares.</a:t>
-            </a:r>
-          </a:p>
-          <a:p>
-            <a:pPr>
-              <a:spcAft>
-                <a:spcPts val="600"/>
-              </a:spcAft>
-            </a:pPr>
-            <a:r>
-              <a:rPr sz="1500">
-                <a:solidFill>
-                  <a:srgbClr val="22282E"/>
-                </a:solidFill>
-              </a:rPr>
-              <a:t>•  Leer e identificar tags con un Proxmark3.</a:t>
-            </a:r>
-          </a:p>
-          <a:p>
-            <a:pPr>
-              <a:spcAft>
-                <a:spcPts val="600"/>
-              </a:spcAft>
-            </a:pPr>
-            <a:r>
-              <a:rPr sz="1500">
-                <a:solidFill>
-                  <a:srgbClr val="22282E"/>
-                </a:solidFill>
-              </a:rPr>
-              <a:t>•  Explicar la debilidad de MIFARE Classic (Crypto-1) y los ataques nested/darkside.</a:t>
-            </a:r>
-          </a:p>
-          <a:p>
-            <a:pPr>
-              <a:spcAft>
-                <a:spcPts val="600"/>
-              </a:spcAft>
-            </a:pPr>
-            <a:r>
-              <a:rPr sz="1500">
-                <a:solidFill>
-                  <a:srgbClr val="22282E"/>
-                </a:solidFill>
-              </a:rPr>
-              <a:t>•  Recuperar claves y volcar el contenido de una tarjeta MIFARE propia.</a:t>
-            </a:r>
-          </a:p>
-          <a:p>
-            <a:pPr>
-              <a:spcAft>
-                <a:spcPts val="600"/>
-              </a:spcAft>
-            </a:pPr>
-            <a:r>
-              <a:rPr sz="1500">
-                <a:solidFill>
-                  <a:srgbClr val="22282E"/>
-                </a:solidFill>
-              </a:rPr>
-              <a:t>•  Clonar un tag propio a una tarjeta regrabable (magic card).</a:t>
-            </a:r>
-          </a:p>
-          <a:p>
-            <a:pPr>
-              <a:spcAft>
-                <a:spcPts val="600"/>
-              </a:spcAft>
-            </a:pPr>
-            <a:r>
-              <a:rPr sz="1500">
-                <a:solidFill>
-                  <a:srgbClr val="22282E"/>
-                </a:solidFill>
-              </a:rPr>
-              <a:t>•  Recomendar controles para sistemas de acceso por proximidad.</a:t>
+              <a:t>•  Distinguir RFID LF, HF/NFC, UHF y las familias/protocolos relevantes sin inferir seguridad solo por frecuencia o forma.</a:t>
+            </a:r>
+          </a:p>
+          <a:p>
+            <a:pPr>
+              <a:spcAft>
+                <a:spcPts val="600"/>
+              </a:spcAft>
+            </a:pPr>
+            <a:r>
+              <a:rPr sz="1500">
+                <a:solidFill>
+                  <a:srgbClr val="22282E"/>
+                </a:solidFill>
+              </a:rPr>
+              <a:t>•  Separar identificador, datos, claves, autenticación, emulación y autorización del backend.</a:t>
+            </a:r>
+          </a:p>
+          <a:p>
+            <a:pPr>
+              <a:spcAft>
+                <a:spcPts val="600"/>
+              </a:spcAft>
+            </a:pPr>
+            <a:r>
+              <a:rPr sz="1500">
+                <a:solidFill>
+                  <a:srgbClr val="22282E"/>
+                </a:solidFill>
+              </a:rPr>
+              <a:t>•  Reconocer credencial, lector, herramienta de análisis y control defensivo por su función.</a:t>
+            </a:r>
+          </a:p>
+          <a:p>
+            <a:pPr>
+              <a:spcAft>
+                <a:spcPts val="600"/>
+              </a:spcAft>
+            </a:pPr>
+            <a:r>
+              <a:rPr sz="1500">
+                <a:solidFill>
+                  <a:srgbClr val="22282E"/>
+                </a:solidFill>
+              </a:rPr>
+              <a:t>•  Configurar y administrar Flipper Zero, Proxmark3 o lector compatible con firmware, cliente, respaldo y borrado seguros.</a:t>
+            </a:r>
+          </a:p>
+          <a:p>
+            <a:pPr>
+              <a:spcAft>
+                <a:spcPts val="600"/>
+              </a:spcAft>
+            </a:pPr>
+            <a:r>
+              <a:rPr sz="1500">
+                <a:solidFill>
+                  <a:srgbClr val="22282E"/>
+                </a:solidFill>
+              </a:rPr>
+              <a:t>•  Identificar una credencial de laboratorio sin escribirla ni atacar claves de terceros.</a:t>
+            </a:r>
+          </a:p>
+          <a:p>
+            <a:pPr>
+              <a:spcAft>
+                <a:spcPts val="600"/>
+              </a:spcAft>
+            </a:pPr>
+            <a:r>
+              <a:rPr sz="1500">
+                <a:solidFill>
+                  <a:srgbClr val="22282E"/>
+                </a:solidFill>
+              </a:rPr>
+              <a:t>•  Interpretar logs del controlador y demostrar si el backend decide por UID, dato autenticado o estado adicional.</a:t>
             </a:r>
           </a:p>
         </p:txBody>
@@ -4462,97 +4612,97 @@
                   <a:srgbClr val="22282E"/>
                 </a:solidFill>
               </a:rPr>
-              <a:t>•  1 — Fundamentos RFID/NFC</a:t>
-            </a:r>
-          </a:p>
-          <a:p>
-            <a:pPr>
-              <a:spcAft>
-                <a:spcPts val="600"/>
-              </a:spcAft>
-            </a:pPr>
-            <a:r>
-              <a:rPr sz="1500">
-                <a:solidFill>
-                  <a:srgbClr val="22282E"/>
-                </a:solidFill>
-              </a:rPr>
-              <a:t>•  2 — LF 125 kHz (EM4100/HID)</a:t>
-            </a:r>
-          </a:p>
-          <a:p>
-            <a:pPr>
-              <a:spcAft>
-                <a:spcPts val="600"/>
-              </a:spcAft>
-            </a:pPr>
-            <a:r>
-              <a:rPr sz="1500">
-                <a:solidFill>
-                  <a:srgbClr val="22282E"/>
-                </a:solidFill>
-              </a:rPr>
-              <a:t>•  3 — HF/NFC 13.56 MHz (MIFARE, NTAG)</a:t>
-            </a:r>
-          </a:p>
-          <a:p>
-            <a:pPr>
-              <a:spcAft>
-                <a:spcPts val="600"/>
-              </a:spcAft>
-            </a:pPr>
-            <a:r>
-              <a:rPr sz="1500">
-                <a:solidFill>
-                  <a:srgbClr val="22282E"/>
-                </a:solidFill>
-              </a:rPr>
-              <a:t>•  4 — Crypto-1 y ataques a MIFARE</a:t>
-            </a:r>
-          </a:p>
-          <a:p>
-            <a:pPr>
-              <a:spcAft>
-                <a:spcPts val="600"/>
-              </a:spcAft>
-            </a:pPr>
-            <a:r>
-              <a:rPr sz="1500">
-                <a:solidFill>
-                  <a:srgbClr val="22282E"/>
-                </a:solidFill>
-              </a:rPr>
-              <a:t>•  5 — Proxmark3: lectura y volcado</a:t>
-            </a:r>
-          </a:p>
-          <a:p>
-            <a:pPr>
-              <a:spcAft>
-                <a:spcPts val="600"/>
-              </a:spcAft>
-            </a:pPr>
-            <a:r>
-              <a:rPr sz="1500">
-                <a:solidFill>
-                  <a:srgbClr val="22282E"/>
-                </a:solidFill>
-              </a:rPr>
-              <a:t>•  6 — Clonado y magic cards</a:t>
-            </a:r>
-          </a:p>
-          <a:p>
-            <a:pPr>
-              <a:spcAft>
-                <a:spcPts val="600"/>
-              </a:spcAft>
-            </a:pPr>
-            <a:r>
-              <a:rPr sz="1500">
-                <a:solidFill>
-                  <a:srgbClr val="22282E"/>
-                </a:solidFill>
-              </a:rPr>
-              <a:t>•  7 — Endurecimiento de accesos</a:t>
+              <a:t>•  1 — LF, HF/NFC y UHF</a:t>
+            </a:r>
+          </a:p>
+          <a:p>
+            <a:pPr>
+              <a:spcAft>
+                <a:spcPts val="600"/>
+              </a:spcAft>
+            </a:pPr>
+            <a:r>
+              <a:rPr sz="1500">
+                <a:solidFill>
+                  <a:srgbClr val="22282E"/>
+                </a:solidFill>
+              </a:rPr>
+              <a:t>•  2 — Credencial–lector–controlador–backend</a:t>
+            </a:r>
+          </a:p>
+          <a:p>
+            <a:pPr>
+              <a:spcAft>
+                <a:spcPts val="600"/>
+              </a:spcAft>
+            </a:pPr>
+            <a:r>
+              <a:rPr sz="1500">
+                <a:solidFill>
+                  <a:srgbClr val="22282E"/>
+                </a:solidFill>
+              </a:rPr>
+              <a:t>•  3 — UID, memoria y autenticación</a:t>
+            </a:r>
+          </a:p>
+          <a:p>
+            <a:pPr>
+              <a:spcAft>
+                <a:spcPts val="600"/>
+              </a:spcAft>
+            </a:pPr>
+            <a:r>
+              <a:rPr sz="1500">
+                <a:solidFill>
+                  <a:srgbClr val="22282E"/>
+                </a:solidFill>
+              </a:rPr>
+              <a:t>•  4 — Lectura, escritura y emulación</a:t>
+            </a:r>
+          </a:p>
+          <a:p>
+            <a:pPr>
+              <a:spcAft>
+                <a:spcPts val="600"/>
+              </a:spcAft>
+            </a:pPr>
+            <a:r>
+              <a:rPr sz="1500">
+                <a:solidFill>
+                  <a:srgbClr val="22282E"/>
+                </a:solidFill>
+              </a:rPr>
+              <a:t>•  5 — Proxmark3 y lectores</a:t>
+            </a:r>
+          </a:p>
+          <a:p>
+            <a:pPr>
+              <a:spcAft>
+                <a:spcPts val="600"/>
+              </a:spcAft>
+            </a:pPr>
+            <a:r>
+              <a:rPr sz="1500">
+                <a:solidFill>
+                  <a:srgbClr val="22282E"/>
+                </a:solidFill>
+              </a:rPr>
+              <a:t>•  6 — Flipper Zero</a:t>
+            </a:r>
+          </a:p>
+          <a:p>
+            <a:pPr>
+              <a:spcAft>
+                <a:spcPts val="600"/>
+              </a:spcAft>
+            </a:pPr>
+            <a:r>
+              <a:rPr sz="1500">
+                <a:solidFill>
+                  <a:srgbClr val="22282E"/>
+                </a:solidFill>
+              </a:rPr>
+              <a:t>•  7 — Detección y mitigación</a:t>
             </a:r>
           </a:p>
         </p:txBody>
@@ -4641,52 +4791,97 @@
                   <a:srgbClr val="22282E"/>
                 </a:solidFill>
               </a:rPr>
-              <a:t>•  RFID agrupa tecnologías distintas; NFC opera a corta distancia en 13,56 MHz y define modos e interoperabilidad. Una tarjeta puede emitir un identificador fijo, autenticar criptográficamente o…</a:t>
-            </a:r>
-          </a:p>
-          <a:p>
-            <a:pPr>
-              <a:spcAft>
-                <a:spcPts val="600"/>
-              </a:spcAft>
-            </a:pPr>
-            <a:r>
-              <a:rPr sz="1500">
-                <a:solidFill>
-                  <a:srgbClr val="22282E"/>
-                </a:solidFill>
-              </a:rPr>
-              <a:t>•  El diagrama coloca la decisión fuera del medio físico. Un sistema que autoriza solo por UID hereda riesgo de copia; uno con desafío-respuesta debe proteger claves y evitar replay; el backend puede…</a:t>
-            </a:r>
-          </a:p>
-          <a:p>
-            <a:pPr>
-              <a:spcAft>
-                <a:spcPts val="600"/>
-              </a:spcAft>
-            </a:pPr>
-            <a:r>
-              <a:rPr sz="1500">
-                <a:solidFill>
-                  <a:srgbClr val="22282E"/>
-                </a:solidFill>
-              </a:rPr>
-              <a:t>•  El laboratorio utiliza tarjetas compradas para práctica y un lector propio, sin credenciales de transporte, pago o acceso real. Se identifica tecnología, se lee información pública, se cambia una…</a:t>
-            </a:r>
-          </a:p>
-          <a:p>
-            <a:pPr>
-              <a:spcAft>
-                <a:spcPts val="600"/>
-              </a:spcAft>
-            </a:pPr>
-            <a:r>
-              <a:rPr sz="1500">
-                <a:solidFill>
-                  <a:srgbClr val="22282E"/>
-                </a:solidFill>
-              </a:rPr>
-              <a:t>•  Un emulador presenta el mismo UID, pero el lector exige respuesta criptográfica y contador coherente. La copia falla. El informe distingue la exposición del identificador de la resistencia de…</a:t>
+              <a:t>•  RFID abarca sistemas que intercambian identidad o datos por radio. En control de acceso son comunes credenciales LF alrededor de 125 kHz y HF a 13,56 MHz; NFC es un conjunto de tecnologías HF de…</a:t>
+            </a:r>
+          </a:p>
+          <a:p>
+            <a:pPr>
+              <a:spcAft>
+                <a:spcPts val="600"/>
+              </a:spcAft>
+            </a:pPr>
+            <a:r>
+              <a:rPr sz="1500">
+                <a:solidFill>
+                  <a:srgbClr val="22282E"/>
+                </a:solidFill>
+              </a:rPr>
+              <a:t>•  La frecuencia ayuda a seleccionar antena e instrumento. No dice por sí sola si una credencial es clonable, si hay criptografía o si el sistema acepta solo un número. «MIFARE» tampoco basta: Classic…</a:t>
+            </a:r>
+          </a:p>
+          <a:p>
+            <a:pPr>
+              <a:spcAft>
+                <a:spcPts val="600"/>
+              </a:spcAft>
+            </a:pPr>
+            <a:r>
+              <a:rPr sz="1500">
+                <a:solidFill>
+                  <a:srgbClr val="22282E"/>
+                </a:solidFill>
+              </a:rPr>
+              <a:t>•  El diagrama explica por qué copiar un valor visible no prueba bypass. El lector puede ejecutar autenticación mutua; el controlador puede usar claves diversificadas; el backend puede exigir horario…</a:t>
+            </a:r>
+          </a:p>
+          <a:p>
+            <a:pPr>
+              <a:spcAft>
+                <a:spcPts val="600"/>
+              </a:spcAft>
+            </a:pPr>
+            <a:r>
+              <a:rPr sz="1500">
+                <a:solidFill>
+                  <a:srgbClr val="22282E"/>
+                </a:solidFill>
+              </a:rPr>
+              <a:t>•  Identificación: reconocer una tarjeta o leer un UID/serial. Ese valor puede ser público y no secreto.</a:t>
+            </a:r>
+          </a:p>
+          <a:p>
+            <a:pPr>
+              <a:spcAft>
+                <a:spcPts val="600"/>
+              </a:spcAft>
+            </a:pPr>
+            <a:r>
+              <a:rPr sz="1500">
+                <a:solidFill>
+                  <a:srgbClr val="22282E"/>
+                </a:solidFill>
+              </a:rPr>
+              <a:t>•  Acceso a datos: leer bloques o archivos. Puede requerir selección de aplicación, permisos o claves.</a:t>
+            </a:r>
+          </a:p>
+          <a:p>
+            <a:pPr>
+              <a:spcAft>
+                <a:spcPts val="600"/>
+              </a:spcAft>
+            </a:pPr>
+            <a:r>
+              <a:rPr sz="1500">
+                <a:solidFill>
+                  <a:srgbClr val="22282E"/>
+                </a:solidFill>
+              </a:rPr>
+              <a:t>•  Autenticación: demostrar conocimiento de una clave o ejecutar un protocolo desafío-respuesta.</a:t>
+            </a:r>
+          </a:p>
+          <a:p>
+            <a:pPr>
+              <a:spcAft>
+                <a:spcPts val="600"/>
+              </a:spcAft>
+            </a:pPr>
+            <a:r>
+              <a:rPr sz="1500">
+                <a:solidFill>
+                  <a:srgbClr val="22282E"/>
+                </a:solidFill>
+              </a:rPr>
+              <a:t>•  Autorización: decisión de negocio sobre una puerta, compra o servicio. Ocurre en lector/controlador/backend según diseño.</a:t>
             </a:r>
           </a:p>
         </p:txBody>
@@ -4737,7 +4932,7 @@
                   <a:srgbClr val="0B3D2E"/>
                 </a:solidFill>
               </a:rPr>
-              <a:t>📔 Glosario operativo</a:t>
+              <a:t>📖 Definiciones y características</a:t>
             </a:r>
           </a:p>
         </p:txBody>
@@ -4775,82 +4970,97 @@
                   <a:srgbClr val="22282E"/>
                 </a:solidFill>
               </a:rPr>
-              <a:t>•  Término — Definición útil</a:t>
-            </a:r>
-          </a:p>
-          <a:p>
-            <a:pPr>
-              <a:spcAft>
-                <a:spcPts val="600"/>
-              </a:spcAft>
-            </a:pPr>
-            <a:r>
-              <a:rPr sz="1500">
-                <a:solidFill>
-                  <a:srgbClr val="22282E"/>
-                </a:solidFill>
-              </a:rPr>
-              <a:t>•  UID — Identificador de tag; su estabilidad y seguridad dependen de tecnología.</a:t>
-            </a:r>
-          </a:p>
-          <a:p>
-            <a:pPr>
-              <a:spcAft>
-                <a:spcPts val="600"/>
-              </a:spcAft>
-            </a:pPr>
-            <a:r>
-              <a:rPr sz="1500">
-                <a:solidFill>
-                  <a:srgbClr val="22282E"/>
-                </a:solidFill>
-              </a:rPr>
-              <a:t>•  Anticolisión — Procedimiento para seleccionar tags presentes simultáneamente.</a:t>
-            </a:r>
-          </a:p>
-          <a:p>
-            <a:pPr>
-              <a:spcAft>
-                <a:spcPts val="600"/>
-              </a:spcAft>
-            </a:pPr>
-            <a:r>
-              <a:rPr sz="1500">
-                <a:solidFill>
-                  <a:srgbClr val="22282E"/>
-                </a:solidFill>
-              </a:rPr>
-              <a:t>•  Challenge-response — Autenticación que prueba conocimiento sin repetir una respuesta fija.</a:t>
-            </a:r>
-          </a:p>
-          <a:p>
-            <a:pPr>
-              <a:spcAft>
-                <a:spcPts val="600"/>
-              </a:spcAft>
-            </a:pPr>
-            <a:r>
-              <a:rPr sz="1500">
-                <a:solidFill>
-                  <a:srgbClr val="22282E"/>
-                </a:solidFill>
-              </a:rPr>
-              <a:t>•  Replay — Reutilización de una comunicación anterior.</a:t>
-            </a:r>
-          </a:p>
-          <a:p>
-            <a:pPr>
-              <a:spcAft>
-                <a:spcPts val="600"/>
-              </a:spcAft>
-            </a:pPr>
-            <a:r>
-              <a:rPr sz="1500">
-                <a:solidFill>
-                  <a:srgbClr val="22282E"/>
-                </a:solidFill>
-              </a:rPr>
-              <a:t>•  Sector/block — Organización de memoria presente en algunas familias de tarjetas.</a:t>
+              <a:t>•  RFID LF: familias de baja frecuencia usadas en proximidad; no todas comparten codificación o formato.</a:t>
+            </a:r>
+          </a:p>
+          <a:p>
+            <a:pPr>
+              <a:spcAft>
+                <a:spcPts val="600"/>
+              </a:spcAft>
+            </a:pPr>
+            <a:r>
+              <a:rPr sz="1500">
+                <a:solidFill>
+                  <a:srgbClr val="22282E"/>
+                </a:solidFill>
+              </a:rPr>
+              <a:t>•  NFC: tecnologías HF a 13,56 MHz con modos y protocolos definidos; proximidad no implica seguridad.</a:t>
+            </a:r>
+          </a:p>
+          <a:p>
+            <a:pPr>
+              <a:spcAft>
+                <a:spcPts val="600"/>
+              </a:spcAft>
+            </a:pPr>
+            <a:r>
+              <a:rPr sz="1500">
+                <a:solidFill>
+                  <a:srgbClr val="22282E"/>
+                </a:solidFill>
+              </a:rPr>
+              <a:t>•  UID: identificador de chip/tarjeta; según familia puede ser fijo, aleatorio o emulable y no debe asumirse secreto.</a:t>
+            </a:r>
+          </a:p>
+          <a:p>
+            <a:pPr>
+              <a:spcAft>
+                <a:spcPts val="600"/>
+              </a:spcAft>
+            </a:pPr>
+            <a:r>
+              <a:rPr sz="1500">
+                <a:solidFill>
+                  <a:srgbClr val="22282E"/>
+                </a:solidFill>
+              </a:rPr>
+              <a:t>•  Sector/bloque/archivo: unidades de organización que dependen de la tecnología.</a:t>
+            </a:r>
+          </a:p>
+          <a:p>
+            <a:pPr>
+              <a:spcAft>
+                <a:spcPts val="600"/>
+              </a:spcAft>
+            </a:pPr>
+            <a:r>
+              <a:rPr sz="1500">
+                <a:solidFill>
+                  <a:srgbClr val="22282E"/>
+                </a:solidFill>
+              </a:rPr>
+              <a:t>•  Autenticación mutua: ambas partes prueban conocimiento/identidad antes de intercambiar datos protegidos.</a:t>
+            </a:r>
+          </a:p>
+          <a:p>
+            <a:pPr>
+              <a:spcAft>
+                <a:spcPts val="600"/>
+              </a:spcAft>
+            </a:pPr>
+            <a:r>
+              <a:rPr sz="1500">
+                <a:solidFill>
+                  <a:srgbClr val="22282E"/>
+                </a:solidFill>
+              </a:rPr>
+              <a:t>•  Emulación: herramienta responde como una credencial compatible bajo condiciones concretas.</a:t>
+            </a:r>
+          </a:p>
+          <a:p>
+            <a:pPr>
+              <a:spcAft>
+                <a:spcPts val="600"/>
+              </a:spcAft>
+            </a:pPr>
+            <a:r>
+              <a:rPr sz="1500">
+                <a:solidFill>
+                  <a:srgbClr val="22282E"/>
+                </a:solidFill>
+              </a:rPr>
+              <a:t>•  Diversificación de claves: derivación de claves por credencial para limitar el impacto de una extracción.</a:t>
             </a:r>
           </a:p>
         </p:txBody>
@@ -4901,7 +5111,7 @@
                   <a:srgbClr val="0B3D2E"/>
                 </a:solidFill>
               </a:rPr>
-              <a:t>✅ Criterio de dominio</a:t>
+              <a:t>📔 Glosario operativo</a:t>
             </a:r>
           </a:p>
         </p:txBody>
@@ -4939,7 +5149,97 @@
                   <a:srgbClr val="22282E"/>
                 </a:solidFill>
               </a:rPr>
-              <a:t>•  Existe dominio cuando el alumno identifica la tecnología, separa UID, memoria, criptografía y backend, reproduce una prueba solo con tarjetas propias y calibra la conclusión al control realmente…</a:t>
+              <a:t>•  Término — Definición útil</a:t>
+            </a:r>
+          </a:p>
+          <a:p>
+            <a:pPr>
+              <a:spcAft>
+                <a:spcPts val="600"/>
+              </a:spcAft>
+            </a:pPr>
+            <a:r>
+              <a:rPr sz="1500">
+                <a:solidFill>
+                  <a:srgbClr val="22282E"/>
+                </a:solidFill>
+              </a:rPr>
+              <a:t>•  PICC — Tarjeta/objeto sin contacto en terminología ISO 14443.</a:t>
+            </a:r>
+          </a:p>
+          <a:p>
+            <a:pPr>
+              <a:spcAft>
+                <a:spcPts val="600"/>
+              </a:spcAft>
+            </a:pPr>
+            <a:r>
+              <a:rPr sz="1500">
+                <a:solidFill>
+                  <a:srgbClr val="22282E"/>
+                </a:solidFill>
+              </a:rPr>
+              <a:t>•  PCD — Dispositivo lector que genera el campo e inicia comunicación.</a:t>
+            </a:r>
+          </a:p>
+          <a:p>
+            <a:pPr>
+              <a:spcAft>
+                <a:spcPts val="600"/>
+              </a:spcAft>
+            </a:pPr>
+            <a:r>
+              <a:rPr sz="1500">
+                <a:solidFill>
+                  <a:srgbClr val="22282E"/>
+                </a:solidFill>
+              </a:rPr>
+              <a:t>•  APDU — Unidad de comando/respuesta usada por aplicaciones de tarjetas inteligentes.</a:t>
+            </a:r>
+          </a:p>
+          <a:p>
+            <a:pPr>
+              <a:spcAft>
+                <a:spcPts val="600"/>
+              </a:spcAft>
+            </a:pPr>
+            <a:r>
+              <a:rPr sz="1500">
+                <a:solidFill>
+                  <a:srgbClr val="22282E"/>
+                </a:solidFill>
+              </a:rPr>
+              <a:t>•  ATQA/SAK — Respuestas de selección ISO 14443A que ayudan a caracterizar tarjeta.</a:t>
+            </a:r>
+          </a:p>
+          <a:p>
+            <a:pPr>
+              <a:spcAft>
+                <a:spcPts val="600"/>
+              </a:spcAft>
+            </a:pPr>
+            <a:r>
+              <a:rPr sz="1500">
+                <a:solidFill>
+                  <a:srgbClr val="22282E"/>
+                </a:solidFill>
+              </a:rPr>
+              <a:t>•  Crypto-1 — Cifrado histórico asociado a MIFARE Classic; no representa toda MIFARE.</a:t>
+            </a:r>
+          </a:p>
+          <a:p>
+            <a:pPr>
+              <a:spcAft>
+                <a:spcPts val="600"/>
+              </a:spcAft>
+            </a:pPr>
+            <a:r>
+              <a:rPr sz="1500">
+                <a:solidFill>
+                  <a:srgbClr val="22282E"/>
+                </a:solidFill>
+              </a:rPr>
+              <a:t>•  DESFire — Familia con aplicaciones y autenticación criptográfica; la seguridad depende de versión/configuración.</a:t>
             </a:r>
           </a:p>
         </p:txBody>
@@ -4990,7 +5290,7 @@
                   <a:srgbClr val="0B3D2E"/>
                 </a:solidFill>
               </a:rPr>
-              <a:t>📖 Definiciones y características</a:t>
+              <a:t>✅ Criterio de dominio</a:t>
             </a:r>
           </a:p>
         </p:txBody>
@@ -5028,82 +5328,7 @@
                   <a:srgbClr val="22282E"/>
                 </a:solidFill>
               </a:rPr>
-              <a:t>•  RFID LF (125 kHz): tags simples tipo EM4100/HID Prox que suelen transmitir solo un ID sin cifrado. Característica: clonables trivialmente.</a:t>
-            </a:r>
-          </a:p>
-          <a:p>
-            <a:pPr>
-              <a:spcAft>
-                <a:spcPts val="600"/>
-              </a:spcAft>
-            </a:pPr>
-            <a:r>
-              <a:rPr sz="1500">
-                <a:solidFill>
-                  <a:srgbClr val="22282E"/>
-                </a:solidFill>
-              </a:rPr>
-              <a:t>•  NFC (13.56 MHz): subconjunto de HF para comunicación de corto alcance (pagos, tags NTAG). Característica: soportado por smartphones.</a:t>
-            </a:r>
-          </a:p>
-          <a:p>
-            <a:pPr>
-              <a:spcAft>
-                <a:spcPts val="600"/>
-              </a:spcAft>
-            </a:pPr>
-            <a:r>
-              <a:rPr sz="1500">
-                <a:solidFill>
-                  <a:srgbClr val="22282E"/>
-                </a:solidFill>
-              </a:rPr>
-              <a:t>•  MIFARE Classic: tarjeta HF con el cifrado propietario Crypto-1. Característica: roto; sus claves se recuperan en segundos/minutos.</a:t>
-            </a:r>
-          </a:p>
-          <a:p>
-            <a:pPr>
-              <a:spcAft>
-                <a:spcPts val="600"/>
-              </a:spcAft>
-            </a:pPr>
-            <a:r>
-              <a:rPr sz="1500">
-                <a:solidFill>
-                  <a:srgbClr val="22282E"/>
-                </a:solidFill>
-              </a:rPr>
-              <a:t>•  Proxmark3: herramienta versátil de lectura/escritura/emulación RFID LF y HF. Característica: soporta ataques a MIFARE y clonado.</a:t>
-            </a:r>
-          </a:p>
-          <a:p>
-            <a:pPr>
-              <a:spcAft>
-                <a:spcPts val="600"/>
-              </a:spcAft>
-            </a:pPr>
-            <a:r>
-              <a:rPr sz="1500">
-                <a:solidFill>
-                  <a:srgbClr val="22282E"/>
-                </a:solidFill>
-              </a:rPr>
-              <a:t>•  Ataque nested/darkside: técnicas que explotan debilidades de Crypto-1 para recuperar claves de sectores. Característica: requieren al menos una clave o son de fuerza reducida.</a:t>
-            </a:r>
-          </a:p>
-          <a:p>
-            <a:pPr>
-              <a:spcAft>
-                <a:spcPts val="600"/>
-              </a:spcAft>
-            </a:pPr>
-            <a:r>
-              <a:rPr sz="1500">
-                <a:solidFill>
-                  <a:srgbClr val="22282E"/>
-                </a:solidFill>
-              </a:rPr>
-              <a:t>•  Magic card: tarjeta con bloque 0 regrabable que permite fijar un UID arbitrario. Característica: usada para clonar MIFARE Classic.</a:t>
+              <a:t>•  Hay dominio cuando el alumno identifica una familia con evidencia, separa UID/datos/autenticación/autorización, usa solo credenciales de prueba, interpreta la decisión del backend y demuestra que un…</a:t>
             </a:r>
           </a:p>
         </p:txBody>
@@ -5192,37 +5417,22 @@
                   <a:srgbClr val="22282E"/>
                 </a:solidFill>
               </a:rPr>
-              <a:t>•  Proxmark3 (RDV4/Easy) con firmware Iceman, o ACR122U para NFC básico.</a:t>
-            </a:r>
-          </a:p>
-          <a:p>
-            <a:pPr>
-              <a:spcAft>
-                <a:spcPts val="600"/>
-              </a:spcAft>
-            </a:pPr>
-            <a:r>
-              <a:rPr sz="1500">
-                <a:solidFill>
-                  <a:srgbClr val="22282E"/>
-                </a:solidFill>
-              </a:rPr>
-              <a:t>•  libnfc/mfoc/mfcuk en Linux para MIFARE; NFC Tools en móvil.</a:t>
-            </a:r>
-          </a:p>
-          <a:p>
-            <a:pPr>
-              <a:spcAft>
-                <a:spcPts val="600"/>
-              </a:spcAft>
-            </a:pPr>
-            <a:r>
-              <a:rPr sz="1500">
-                <a:solidFill>
-                  <a:srgbClr val="22282E"/>
-                </a:solidFill>
-              </a:rPr>
-              <a:t>•  Tarjetas y tags propios; magic cards para pruebas de clonado.</a:t>
+              <a:t>•  Banco mínimo: dos credenciales de prueba de familias conocidas, lector USB PC/SC o NFC de teléfono en modo compatible, aplicación local y registro sintético. Banco avanzado: Proxmark3 con…</a:t>
+            </a:r>
+          </a:p>
+          <a:p>
+            <a:pPr>
+              <a:spcAft>
+                <a:spcPts val="600"/>
+              </a:spcAft>
+            </a:pPr>
+            <a:r>
+              <a:rPr sz="1500">
+                <a:solidFill>
+                  <a:srgbClr val="22282E"/>
+                </a:solidFill>
+              </a:rPr>
+              <a:t>•  Los comandos consultan tecnologías compatibles y no son una orden universal: revisa help de la versión instalada. No se incluyen recuperación de claves, escritura ni clonado porque el objetivo del…</a:t>
             </a:r>
           </a:p>
         </p:txBody>
